--- a/products/aithera/scenario-simulator/docs/templates/scenario-brief-template.pptx
+++ b/products/aithera/scenario-simulator/docs/templates/scenario-brief-template.pptx
@@ -524,7 +524,7 @@
           <a:p/>
           <a:p>
             <a:r>
-              <a:t>One slide per step: duplicate a STEP slide (Cmd/Ctrl+D) for each new step rather than inserting from the layout gallery. Delete THE OPENING if the scenario has no warm-up. Delete EXAMPLES slides you don’t need — the wizard drafts examples itself.</a:t>
+              <a:t>One slide per step: duplicate a STEP slide (Cmd/Ctrl+D) for each new step rather than inserting from the layout gallery. Delete INITIAL REFLECTION if the scenario has no warm-up. Delete EXAMPLES slides you don’t need — the wizard drafts examples itself.</a:t>
             </a:r>
           </a:p>
           <a:p/>
@@ -587,7 +587,7 @@
         <p:spPr>
           <a:xfrm>
             <a:off x="457200" y="1097280"/>
-            <a:ext cx="7040880" cy="1371600"/>
+            <a:ext cx="7040880" cy="4663440"/>
           </a:xfrm>
           <a:prstGeom prst="roundRect">
             <a:avLst>
@@ -630,8 +630,8 @@
         </p:nvSpPr>
         <p:spPr>
           <a:xfrm>
-            <a:off x="457200" y="2651760"/>
-            <a:ext cx="7040880" cy="914400"/>
+            <a:off x="8881567" y="384048"/>
+            <a:ext cx="2852928" cy="329184"/>
           </a:xfrm>
           <a:prstGeom prst="roundRect">
             <a:avLst>
@@ -639,7 +639,7 @@
             </a:avLst>
           </a:prstGeom>
           <a:solidFill>
-            <a:srgbClr val="EEF4FB"/>
+            <a:srgbClr val="E3ECF7"/>
           </a:solidFill>
           <a:ln>
             <a:noFill/>
@@ -668,14 +668,159 @@
       </p:sp>
       <p:sp>
         <p:nvSpPr>
-          <p:cNvPr id="5" name="panel"/>
+          <p:cNvPr id="5" name="chip"/>
+          <p:cNvSpPr txBox="1"/>
+          <p:nvPr/>
+        </p:nvSpPr>
+        <p:spPr>
+          <a:xfrm>
+            <a:off x="8881567" y="384048"/>
+            <a:ext cx="2852928" cy="329184"/>
+          </a:xfrm>
+          <a:prstGeom prst="rect">
+            <a:avLst/>
+          </a:prstGeom>
+          <a:noFill/>
+        </p:spPr>
+        <p:txBody>
+          <a:bodyPr wrap="square" lIns="109728" rIns="109728" tIns="27432" bIns="27432" anchor="ctr">
+            <a:spAutoFit/>
+          </a:bodyPr>
+          <a:lstStyle/>
+          <a:p>
+            <a:r>
+              <a:rPr sz="900" b="0" i="0">
+                <a:solidFill>
+                  <a:srgbClr val="43505E"/>
+                </a:solidFill>
+                <a:latin typeface="Calibri"/>
+              </a:rPr>
+              <a:t>Cover  →  editor: Basics · Title</a:t>
+            </a:r>
+          </a:p>
+        </p:txBody>
+      </p:sp>
+      <p:sp>
+        <p:nvSpPr>
+          <p:cNvPr id="6" name="help"/>
+          <p:cNvSpPr txBox="1"/>
+          <p:nvPr/>
+        </p:nvSpPr>
+        <p:spPr>
+          <a:xfrm>
+            <a:off x="457200" y="5486400"/>
+            <a:ext cx="7040880" cy="274320"/>
+          </a:xfrm>
+          <a:prstGeom prst="rect">
+            <a:avLst/>
+          </a:prstGeom>
+          <a:noFill/>
+        </p:spPr>
+        <p:txBody>
+          <a:bodyPr wrap="square" lIns="109728" rIns="109728" tIns="27432" bIns="27432" anchor="ctr">
+            <a:spAutoFit/>
+          </a:bodyPr>
+          <a:lstStyle/>
+          <a:p>
+            <a:r>
+              <a:rPr sz="750" b="0" i="1">
+                <a:solidFill>
+                  <a:srgbClr val="6B7785"/>
+                </a:solidFill>
+                <a:latin typeface="Calibri"/>
+              </a:rPr>
+              <a:t>Working title — the draft proposes one if blank.  → editor: Basics · Title</a:t>
+            </a:r>
+          </a:p>
+        </p:txBody>
+      </p:sp>
+      <p:sp>
+        <p:nvSpPr>
+          <p:cNvPr id="7" name="footer"/>
+          <p:cNvSpPr txBox="1"/>
+          <p:nvPr/>
+        </p:nvSpPr>
+        <p:spPr>
+          <a:xfrm>
+            <a:off x="457200" y="6510528"/>
+            <a:ext cx="5943600" cy="274320"/>
+          </a:xfrm>
+          <a:prstGeom prst="rect">
+            <a:avLst/>
+          </a:prstGeom>
+          <a:noFill/>
+        </p:spPr>
+        <p:txBody>
+          <a:bodyPr wrap="square" lIns="109728" rIns="109728" tIns="27432" bIns="27432" anchor="t">
+            <a:spAutoFit/>
+          </a:bodyPr>
+          <a:lstStyle/>
+          <a:p>
+            <a:r>
+              <a:rPr sz="800" b="1" i="0">
+                <a:solidFill>
+                  <a:srgbClr val="6B7785"/>
+                </a:solidFill>
+                <a:latin typeface="Calibri"/>
+              </a:rPr>
+              <a:t>Scenario Brief · template v1</a:t>
+            </a:r>
+            <a:r>
+              <a:rPr sz="800" b="0" i="0">
+                <a:solidFill>
+                  <a:srgbClr val="6B7785"/>
+                </a:solidFill>
+                <a:latin typeface="Calibri"/>
+              </a:rPr>
+              <a:t>  ·  Aithera Scenario Simulator</a:t>
+            </a:r>
+          </a:p>
+        </p:txBody>
+      </p:sp>
+      <p:sp>
+        <p:nvSpPr>
+          <p:cNvPr id="8" name="footer"/>
+          <p:cNvSpPr txBox="1"/>
+          <p:nvPr/>
+        </p:nvSpPr>
+        <p:spPr>
+          <a:xfrm>
+            <a:off x="6309360" y="6510528"/>
+            <a:ext cx="5422392" cy="274320"/>
+          </a:xfrm>
+          <a:prstGeom prst="rect">
+            <a:avLst/>
+          </a:prstGeom>
+          <a:noFill/>
+        </p:spPr>
+        <p:txBody>
+          <a:bodyPr wrap="square" lIns="109728" rIns="109728" tIns="27432" bIns="27432" anchor="t">
+            <a:spAutoFit/>
+          </a:bodyPr>
+          <a:lstStyle/>
+          <a:p>
+            <a:r>
+              <a:rPr sz="800" b="0" i="1">
+                <a:solidFill>
+                  <a:srgbClr val="6B7785"/>
+                </a:solidFill>
+                <a:latin typeface="Calibri"/>
+              </a:rPr>
+              <a:t>Fields are placeholders — type into them. Text boxes and tables are not exported.</a:t>
+            </a:r>
+          </a:p>
+        </p:txBody>
+      </p:sp>
+      <p:sp>
+        <p:nvSpPr>
+          <p:cNvPr id="9" name="panel"/>
           <p:cNvSpPr/>
           <p:nvPr/>
         </p:nvSpPr>
         <p:spPr>
           <a:xfrm>
-            <a:off x="457200" y="3749039"/>
-            <a:ext cx="3383280" cy="914400"/>
+            <a:off x="7863840" y="1097280"/>
+            <a:ext cx="3867912" cy="4663440"/>
           </a:xfrm>
           <a:prstGeom prst="roundRect">
             <a:avLst>
@@ -683,7 +828,7 @@
             </a:avLst>
           </a:prstGeom>
           <a:solidFill>
-            <a:srgbClr val="EEF4FB"/>
+            <a:srgbClr val="E3ECF7"/>
           </a:solidFill>
           <a:ln>
             <a:noFill/>
@@ -712,464 +857,7 @@
       </p:sp>
       <p:sp>
         <p:nvSpPr>
-          <p:cNvPr id="6" name="panel"/>
-          <p:cNvSpPr/>
-          <p:nvPr/>
-        </p:nvSpPr>
-        <p:spPr>
-          <a:xfrm>
-            <a:off x="4114800" y="3749039"/>
-            <a:ext cx="3383280" cy="914400"/>
-          </a:xfrm>
-          <a:prstGeom prst="roundRect">
-            <a:avLst>
-              <a:gd name="adj" fmla="val 4500"/>
-            </a:avLst>
-          </a:prstGeom>
-          <a:solidFill>
-            <a:srgbClr val="EEF4FB"/>
-          </a:solidFill>
-          <a:ln>
-            <a:noFill/>
-          </a:ln>
-          <a:effectLst/>
-        </p:spPr>
-        <p:style>
-          <a:lnRef idx="1">
-            <a:schemeClr val="accent1"/>
-          </a:lnRef>
-          <a:fillRef idx="3">
-            <a:schemeClr val="accent1"/>
-          </a:fillRef>
-          <a:effectRef idx="2">
-            <a:schemeClr val="accent1"/>
-          </a:effectRef>
-          <a:fontRef idx="minor">
-            <a:schemeClr val="lt1"/>
-          </a:fontRef>
-        </p:style>
-        <p:txBody>
-          <a:bodyPr rtlCol="0" anchor="ctr"/>
-          <a:lstStyle/>
-          <a:p/>
-        </p:txBody>
-      </p:sp>
-      <p:sp>
-        <p:nvSpPr>
-          <p:cNvPr id="7" name="panel"/>
-          <p:cNvSpPr/>
-          <p:nvPr/>
-        </p:nvSpPr>
-        <p:spPr>
-          <a:xfrm>
-            <a:off x="457200" y="4846320"/>
-            <a:ext cx="7040880" cy="914400"/>
-          </a:xfrm>
-          <a:prstGeom prst="roundRect">
-            <a:avLst>
-              <a:gd name="adj" fmla="val 4500"/>
-            </a:avLst>
-          </a:prstGeom>
-          <a:solidFill>
-            <a:srgbClr val="EEF4FB"/>
-          </a:solidFill>
-          <a:ln>
-            <a:noFill/>
-          </a:ln>
-          <a:effectLst/>
-        </p:spPr>
-        <p:style>
-          <a:lnRef idx="1">
-            <a:schemeClr val="accent1"/>
-          </a:lnRef>
-          <a:fillRef idx="3">
-            <a:schemeClr val="accent1"/>
-          </a:fillRef>
-          <a:effectRef idx="2">
-            <a:schemeClr val="accent1"/>
-          </a:effectRef>
-          <a:fontRef idx="minor">
-            <a:schemeClr val="lt1"/>
-          </a:fontRef>
-        </p:style>
-        <p:txBody>
-          <a:bodyPr rtlCol="0" anchor="ctr"/>
-          <a:lstStyle/>
-          <a:p/>
-        </p:txBody>
-      </p:sp>
-      <p:sp>
-        <p:nvSpPr>
-          <p:cNvPr id="8" name="panel"/>
-          <p:cNvSpPr/>
-          <p:nvPr/>
-        </p:nvSpPr>
-        <p:spPr>
-          <a:xfrm>
-            <a:off x="7948879" y="384048"/>
-            <a:ext cx="3785616" cy="329184"/>
-          </a:xfrm>
-          <a:prstGeom prst="roundRect">
-            <a:avLst>
-              <a:gd name="adj" fmla="val 4500"/>
-            </a:avLst>
-          </a:prstGeom>
-          <a:solidFill>
-            <a:srgbClr val="E3ECF7"/>
-          </a:solidFill>
-          <a:ln>
-            <a:noFill/>
-          </a:ln>
-          <a:effectLst/>
-        </p:spPr>
-        <p:style>
-          <a:lnRef idx="1">
-            <a:schemeClr val="accent1"/>
-          </a:lnRef>
-          <a:fillRef idx="3">
-            <a:schemeClr val="accent1"/>
-          </a:fillRef>
-          <a:effectRef idx="2">
-            <a:schemeClr val="accent1"/>
-          </a:effectRef>
-          <a:fontRef idx="minor">
-            <a:schemeClr val="lt1"/>
-          </a:fontRef>
-        </p:style>
-        <p:txBody>
-          <a:bodyPr rtlCol="0" anchor="ctr"/>
-          <a:lstStyle/>
-          <a:p/>
-        </p:txBody>
-      </p:sp>
-      <p:sp>
-        <p:nvSpPr>
-          <p:cNvPr id="9" name="chip"/>
-          <p:cNvSpPr txBox="1"/>
-          <p:nvPr/>
-        </p:nvSpPr>
-        <p:spPr>
-          <a:xfrm>
-            <a:off x="7948879" y="384048"/>
-            <a:ext cx="3785616" cy="329184"/>
-          </a:xfrm>
-          <a:prstGeom prst="rect">
-            <a:avLst/>
-          </a:prstGeom>
-          <a:noFill/>
-        </p:spPr>
-        <p:txBody>
-          <a:bodyPr wrap="square" lIns="109728" rIns="109728" tIns="27432" bIns="27432" anchor="ctr">
-            <a:spAutoFit/>
-          </a:bodyPr>
-          <a:lstStyle/>
-          <a:p>
-            <a:r>
-              <a:rPr sz="900" b="0" i="0">
-                <a:solidFill>
-                  <a:srgbClr val="43505E"/>
-                </a:solidFill>
-                <a:latin typeface="Calibri"/>
-              </a:rPr>
-              <a:t>Cover · the team’s own record — not imported</a:t>
-            </a:r>
-          </a:p>
-        </p:txBody>
-      </p:sp>
-      <p:sp>
-        <p:nvSpPr>
-          <p:cNvPr id="10" name="help"/>
-          <p:cNvSpPr txBox="1"/>
-          <p:nvPr/>
-        </p:nvSpPr>
-        <p:spPr>
-          <a:xfrm>
-            <a:off x="457200" y="2194560"/>
-            <a:ext cx="7040880" cy="274320"/>
-          </a:xfrm>
-          <a:prstGeom prst="rect">
-            <a:avLst/>
-          </a:prstGeom>
-          <a:noFill/>
-        </p:spPr>
-        <p:txBody>
-          <a:bodyPr wrap="square" lIns="109728" rIns="109728" tIns="27432" bIns="27432" anchor="ctr">
-            <a:spAutoFit/>
-          </a:bodyPr>
-          <a:lstStyle/>
-          <a:p>
-            <a:r>
-              <a:rPr sz="750" b="0" i="1">
-                <a:solidFill>
-                  <a:srgbClr val="6B7785"/>
-                </a:solidFill>
-                <a:latin typeface="Calibri"/>
-              </a:rPr>
-              <a:t>Working title — the draft proposes one if blank.  → editor: Basics · Title</a:t>
-            </a:r>
-          </a:p>
-        </p:txBody>
-      </p:sp>
-      <p:sp>
-        <p:nvSpPr>
-          <p:cNvPr id="11" name="help"/>
-          <p:cNvSpPr txBox="1"/>
-          <p:nvPr/>
-        </p:nvSpPr>
-        <p:spPr>
-          <a:xfrm>
-            <a:off x="457200" y="3291840"/>
-            <a:ext cx="7040880" cy="274320"/>
-          </a:xfrm>
-          <a:prstGeom prst="rect">
-            <a:avLst/>
-          </a:prstGeom>
-          <a:noFill/>
-        </p:spPr>
-        <p:txBody>
-          <a:bodyPr wrap="square" lIns="109728" rIns="109728" tIns="27432" bIns="27432" anchor="ctr">
-            <a:spAutoFit/>
-          </a:bodyPr>
-          <a:lstStyle/>
-          <a:p>
-            <a:r>
-              <a:rPr sz="750" b="0" i="1">
-                <a:solidFill>
-                  <a:srgbClr val="6B7785"/>
-                </a:solidFill>
-                <a:latin typeface="Calibri"/>
-              </a:rPr>
-              <a:t>The course or program, with its code. Sets the register.  → wizard: The training it lives inside</a:t>
-            </a:r>
-          </a:p>
-        </p:txBody>
-      </p:sp>
-      <p:sp>
-        <p:nvSpPr>
-          <p:cNvPr id="12" name="help"/>
-          <p:cNvSpPr txBox="1"/>
-          <p:nvPr/>
-        </p:nvSpPr>
-        <p:spPr>
-          <a:xfrm>
-            <a:off x="457200" y="4389120"/>
-            <a:ext cx="3383280" cy="274320"/>
-          </a:xfrm>
-          <a:prstGeom prst="rect">
-            <a:avLst/>
-          </a:prstGeom>
-          <a:noFill/>
-        </p:spPr>
-        <p:txBody>
-          <a:bodyPr wrap="square" lIns="109728" rIns="109728" tIns="27432" bIns="27432" anchor="ctr">
-            <a:spAutoFit/>
-          </a:bodyPr>
-          <a:lstStyle/>
-          <a:p>
-            <a:r>
-              <a:rPr sz="750" b="0" i="1">
-                <a:solidFill>
-                  <a:srgbClr val="6B7785"/>
-                </a:solidFill>
-                <a:latin typeface="Calibri"/>
-              </a:rPr>
-              <a:t>Who to ask about this brief.</a:t>
-            </a:r>
-          </a:p>
-        </p:txBody>
-      </p:sp>
-      <p:sp>
-        <p:nvSpPr>
-          <p:cNvPr id="13" name="help"/>
-          <p:cNvSpPr txBox="1"/>
-          <p:nvPr/>
-        </p:nvSpPr>
-        <p:spPr>
-          <a:xfrm>
-            <a:off x="4114800" y="4389120"/>
-            <a:ext cx="3383280" cy="274320"/>
-          </a:xfrm>
-          <a:prstGeom prst="rect">
-            <a:avLst/>
-          </a:prstGeom>
-          <a:noFill/>
-        </p:spPr>
-        <p:txBody>
-          <a:bodyPr wrap="square" lIns="109728" rIns="109728" tIns="27432" bIns="27432" anchor="ctr">
-            <a:spAutoFit/>
-          </a:bodyPr>
-          <a:lstStyle/>
-          <a:p>
-            <a:r>
-              <a:rPr sz="750" b="0" i="1">
-                <a:solidFill>
-                  <a:srgbClr val="6B7785"/>
-                </a:solidFill>
-                <a:latin typeface="Calibri"/>
-              </a:rPr>
-              <a:t>Your own versioning. PowerPoint keeps the history.</a:t>
-            </a:r>
-          </a:p>
-        </p:txBody>
-      </p:sp>
-      <p:sp>
-        <p:nvSpPr>
-          <p:cNvPr id="14" name="help"/>
-          <p:cNvSpPr txBox="1"/>
-          <p:nvPr/>
-        </p:nvSpPr>
-        <p:spPr>
-          <a:xfrm>
-            <a:off x="457200" y="5486400"/>
-            <a:ext cx="7040880" cy="274320"/>
-          </a:xfrm>
-          <a:prstGeom prst="rect">
-            <a:avLst/>
-          </a:prstGeom>
-          <a:noFill/>
-        </p:spPr>
-        <p:txBody>
-          <a:bodyPr wrap="square" lIns="109728" rIns="109728" tIns="27432" bIns="27432" anchor="ctr">
-            <a:spAutoFit/>
-          </a:bodyPr>
-          <a:lstStyle/>
-          <a:p>
-            <a:r>
-              <a:rPr sz="750" b="0" i="1">
-                <a:solidFill>
-                  <a:srgbClr val="6B7785"/>
-                </a:solidFill>
-                <a:latin typeface="Calibri"/>
-              </a:rPr>
-              <a:t>Draft · SME review · Ready for the editor · Drafted in the editor</a:t>
-            </a:r>
-          </a:p>
-        </p:txBody>
-      </p:sp>
-      <p:sp>
-        <p:nvSpPr>
-          <p:cNvPr id="15" name="footer"/>
-          <p:cNvSpPr txBox="1"/>
-          <p:nvPr/>
-        </p:nvSpPr>
-        <p:spPr>
-          <a:xfrm>
-            <a:off x="457200" y="6510528"/>
-            <a:ext cx="5943600" cy="274320"/>
-          </a:xfrm>
-          <a:prstGeom prst="rect">
-            <a:avLst/>
-          </a:prstGeom>
-          <a:noFill/>
-        </p:spPr>
-        <p:txBody>
-          <a:bodyPr wrap="square" lIns="109728" rIns="109728" tIns="27432" bIns="27432" anchor="t">
-            <a:spAutoFit/>
-          </a:bodyPr>
-          <a:lstStyle/>
-          <a:p>
-            <a:r>
-              <a:rPr sz="800" b="1" i="0">
-                <a:solidFill>
-                  <a:srgbClr val="6B7785"/>
-                </a:solidFill>
-                <a:latin typeface="Calibri"/>
-              </a:rPr>
-              <a:t>Scenario Brief · template v1</a:t>
-            </a:r>
-            <a:r>
-              <a:rPr sz="800" b="0" i="0">
-                <a:solidFill>
-                  <a:srgbClr val="6B7785"/>
-                </a:solidFill>
-                <a:latin typeface="Calibri"/>
-              </a:rPr>
-              <a:t>  ·  Aithera Scenario Simulator</a:t>
-            </a:r>
-          </a:p>
-        </p:txBody>
-      </p:sp>
-      <p:sp>
-        <p:nvSpPr>
-          <p:cNvPr id="16" name="footer"/>
-          <p:cNvSpPr txBox="1"/>
-          <p:nvPr/>
-        </p:nvSpPr>
-        <p:spPr>
-          <a:xfrm>
-            <a:off x="6309360" y="6510528"/>
-            <a:ext cx="5422392" cy="274320"/>
-          </a:xfrm>
-          <a:prstGeom prst="rect">
-            <a:avLst/>
-          </a:prstGeom>
-          <a:noFill/>
-        </p:spPr>
-        <p:txBody>
-          <a:bodyPr wrap="square" lIns="109728" rIns="109728" tIns="27432" bIns="27432" anchor="t">
-            <a:spAutoFit/>
-          </a:bodyPr>
-          <a:lstStyle/>
-          <a:p>
-            <a:r>
-              <a:rPr sz="800" b="0" i="1">
-                <a:solidFill>
-                  <a:srgbClr val="6B7785"/>
-                </a:solidFill>
-                <a:latin typeface="Calibri"/>
-              </a:rPr>
-              <a:t>Fields are placeholders — type into them. Text boxes and tables are not exported.</a:t>
-            </a:r>
-          </a:p>
-        </p:txBody>
-      </p:sp>
-      <p:sp>
-        <p:nvSpPr>
-          <p:cNvPr id="17" name="panel"/>
-          <p:cNvSpPr/>
-          <p:nvPr/>
-        </p:nvSpPr>
-        <p:spPr>
-          <a:xfrm>
-            <a:off x="7863840" y="1097280"/>
-            <a:ext cx="3867912" cy="4663440"/>
-          </a:xfrm>
-          <a:prstGeom prst="roundRect">
-            <a:avLst>
-              <a:gd name="adj" fmla="val 4500"/>
-            </a:avLst>
-          </a:prstGeom>
-          <a:solidFill>
-            <a:srgbClr val="E3ECF7"/>
-          </a:solidFill>
-          <a:ln>
-            <a:noFill/>
-          </a:ln>
-          <a:effectLst/>
-        </p:spPr>
-        <p:style>
-          <a:lnRef idx="1">
-            <a:schemeClr val="accent1"/>
-          </a:lnRef>
-          <a:fillRef idx="3">
-            <a:schemeClr val="accent1"/>
-          </a:fillRef>
-          <a:effectRef idx="2">
-            <a:schemeClr val="accent1"/>
-          </a:effectRef>
-          <a:fontRef idx="minor">
-            <a:schemeClr val="lt1"/>
-          </a:fontRef>
-        </p:style>
-        <p:txBody>
-          <a:bodyPr rtlCol="0" anchor="ctr"/>
-          <a:lstStyle/>
-          <a:p/>
-        </p:txBody>
-      </p:sp>
-      <p:sp>
-        <p:nvSpPr>
-          <p:cNvPr id="18" name="howto"/>
+          <p:cNvPr id="10" name="howto"/>
           <p:cNvSpPr txBox="1"/>
           <p:nvPr/>
         </p:nvSpPr>
@@ -1378,7 +1066,7 @@
       </p:sp>
       <p:sp>
         <p:nvSpPr>
-          <p:cNvPr id="19" name="title"/>
+          <p:cNvPr id="11" name="title"/>
           <p:cNvSpPr/>
           <p:nvPr>
             <p:ph type="title"/>
@@ -1387,7 +1075,7 @@
         <p:spPr>
           <a:xfrm>
             <a:off x="457200" y="274320"/>
-            <a:ext cx="7308799" cy="640080"/>
+            <a:ext cx="8241487" cy="640080"/>
           </a:xfrm>
           <a:prstGeom prst="rect">
             <a:avLst/>
@@ -1420,14 +1108,14 @@
                 </a:solidFill>
                 <a:latin typeface="Calibri"/>
               </a:rPr>
-              <a:t>SCENARIO BRIEF</a:t>
-            </a:r>
-          </a:p>
-        </p:txBody>
-      </p:sp>
-      <p:sp>
-        <p:nvSpPr>
-          <p:cNvPr id="20" name="cover.title"/>
+              <a:t>SCENARIO BASICS</a:t>
+            </a:r>
+          </a:p>
+        </p:txBody>
+      </p:sp>
+      <p:sp>
+        <p:nvSpPr>
+          <p:cNvPr id="12" name="cover.title"/>
           <p:cNvSpPr/>
           <p:nvPr>
             <p:ph type="body" idx="10"/>
@@ -1436,7 +1124,7 @@
         <p:spPr>
           <a:xfrm>
             <a:off x="457200" y="1097280"/>
-            <a:ext cx="7040880" cy="1097280"/>
+            <a:ext cx="7040880" cy="4389120"/>
           </a:xfrm>
           <a:prstGeom prst="rect">
             <a:avLst/>
@@ -1481,270 +1169,6 @@
           <a:p>
             <a:r>
               <a:rPr sz="2400" b="0" i="1">
-                <a:solidFill>
-                  <a:srgbClr val="6B7785"/>
-                </a:solidFill>
-                <a:latin typeface="Calibri"/>
-              </a:rPr>
-              <a:t>Type here — keep the label line above.</a:t>
-            </a:r>
-          </a:p>
-        </p:txBody>
-      </p:sp>
-      <p:sp>
-        <p:nvSpPr>
-          <p:cNvPr id="21" name="cover.training"/>
-          <p:cNvSpPr/>
-          <p:nvPr>
-            <p:ph type="body" idx="11"/>
-          </p:nvPr>
-        </p:nvSpPr>
-        <p:spPr>
-          <a:xfrm>
-            <a:off x="457200" y="2651760"/>
-            <a:ext cx="7040880" cy="640080"/>
-          </a:xfrm>
-          <a:prstGeom prst="rect">
-            <a:avLst/>
-          </a:prstGeom>
-          <a:noFill/>
-        </p:spPr>
-        <p:txBody>
-          <a:bodyPr wrap="square" lIns="109728" rIns="109728" tIns="64008" anchor="t">
-            <a:normAutofit/>
-          </a:bodyPr>
-          <a:lstStyle>
-            <a:lvl1pPr marL="0" indent="0">
-              <a:spcBef>
-                <a:spcPts val="200"/>
-              </a:spcBef>
-              <a:buNone/>
-              <a:defRPr sz="1400" b="0">
-                <a:solidFill>
-                  <a:srgbClr val="1F2A37"/>
-                </a:solidFill>
-                <a:latin typeface="Calibri"/>
-              </a:defRPr>
-            </a:lvl1pPr>
-            <a:lvl2pPr marL="228600" indent="-228600">
-              <a:buChar char="•"/>
-              <a:defRPr sz="1400">
-                <a:latin typeface="Calibri"/>
-              </a:defRPr>
-            </a:lvl2pPr>
-          </a:lstStyle>
-          <a:p>
-            <a:r>
-              <a:rPr sz="900" b="1" i="0" spc="60">
-                <a:solidFill>
-                  <a:srgbClr val="0271CE"/>
-                </a:solidFill>
-                <a:latin typeface="Calibri"/>
-              </a:rPr>
-              <a:t>TRAINING IT LIVES INSIDE</a:t>
-            </a:r>
-          </a:p>
-          <a:p>
-            <a:r>
-              <a:rPr sz="1400" b="0" i="1">
-                <a:solidFill>
-                  <a:srgbClr val="6B7785"/>
-                </a:solidFill>
-                <a:latin typeface="Calibri"/>
-              </a:rPr>
-              <a:t>Type here — keep the label line above.</a:t>
-            </a:r>
-          </a:p>
-        </p:txBody>
-      </p:sp>
-      <p:sp>
-        <p:nvSpPr>
-          <p:cNvPr id="22" name="cover.owner"/>
-          <p:cNvSpPr/>
-          <p:nvPr>
-            <p:ph type="body" idx="12"/>
-          </p:nvPr>
-        </p:nvSpPr>
-        <p:spPr>
-          <a:xfrm>
-            <a:off x="457200" y="3749039"/>
-            <a:ext cx="3383280" cy="640080"/>
-          </a:xfrm>
-          <a:prstGeom prst="rect">
-            <a:avLst/>
-          </a:prstGeom>
-          <a:noFill/>
-        </p:spPr>
-        <p:txBody>
-          <a:bodyPr wrap="square" lIns="109728" rIns="109728" tIns="64008" anchor="t">
-            <a:normAutofit/>
-          </a:bodyPr>
-          <a:lstStyle>
-            <a:lvl1pPr marL="0" indent="0">
-              <a:spcBef>
-                <a:spcPts val="200"/>
-              </a:spcBef>
-              <a:buNone/>
-              <a:defRPr sz="1400" b="0">
-                <a:solidFill>
-                  <a:srgbClr val="1F2A37"/>
-                </a:solidFill>
-                <a:latin typeface="Calibri"/>
-              </a:defRPr>
-            </a:lvl1pPr>
-            <a:lvl2pPr marL="228600" indent="-228600">
-              <a:buChar char="•"/>
-              <a:defRPr sz="1400">
-                <a:latin typeface="Calibri"/>
-              </a:defRPr>
-            </a:lvl2pPr>
-          </a:lstStyle>
-          <a:p>
-            <a:r>
-              <a:rPr sz="900" b="1" i="0" spc="60">
-                <a:solidFill>
-                  <a:srgbClr val="0271CE"/>
-                </a:solidFill>
-                <a:latin typeface="Calibri"/>
-              </a:rPr>
-              <a:t>OWNER</a:t>
-            </a:r>
-          </a:p>
-          <a:p>
-            <a:r>
-              <a:rPr sz="1400" b="0" i="1">
-                <a:solidFill>
-                  <a:srgbClr val="6B7785"/>
-                </a:solidFill>
-                <a:latin typeface="Calibri"/>
-              </a:rPr>
-              <a:t>Type here — keep the label line above.</a:t>
-            </a:r>
-          </a:p>
-        </p:txBody>
-      </p:sp>
-      <p:sp>
-        <p:nvSpPr>
-          <p:cNvPr id="23" name="cover.version"/>
-          <p:cNvSpPr/>
-          <p:nvPr>
-            <p:ph type="body" idx="13"/>
-          </p:nvPr>
-        </p:nvSpPr>
-        <p:spPr>
-          <a:xfrm>
-            <a:off x="4114800" y="3749039"/>
-            <a:ext cx="3383280" cy="640080"/>
-          </a:xfrm>
-          <a:prstGeom prst="rect">
-            <a:avLst/>
-          </a:prstGeom>
-          <a:noFill/>
-        </p:spPr>
-        <p:txBody>
-          <a:bodyPr wrap="square" lIns="109728" rIns="109728" tIns="64008" anchor="t">
-            <a:normAutofit/>
-          </a:bodyPr>
-          <a:lstStyle>
-            <a:lvl1pPr marL="0" indent="0">
-              <a:spcBef>
-                <a:spcPts val="200"/>
-              </a:spcBef>
-              <a:buNone/>
-              <a:defRPr sz="1400" b="0">
-                <a:solidFill>
-                  <a:srgbClr val="1F2A37"/>
-                </a:solidFill>
-                <a:latin typeface="Calibri"/>
-              </a:defRPr>
-            </a:lvl1pPr>
-            <a:lvl2pPr marL="228600" indent="-228600">
-              <a:buChar char="•"/>
-              <a:defRPr sz="1400">
-                <a:latin typeface="Calibri"/>
-              </a:defRPr>
-            </a:lvl2pPr>
-          </a:lstStyle>
-          <a:p>
-            <a:r>
-              <a:rPr sz="900" b="1" i="0" spc="60">
-                <a:solidFill>
-                  <a:srgbClr val="0271CE"/>
-                </a:solidFill>
-                <a:latin typeface="Calibri"/>
-              </a:rPr>
-              <a:t>VERSION · DATE</a:t>
-            </a:r>
-          </a:p>
-          <a:p>
-            <a:r>
-              <a:rPr sz="1400" b="0" i="1">
-                <a:solidFill>
-                  <a:srgbClr val="6B7785"/>
-                </a:solidFill>
-                <a:latin typeface="Calibri"/>
-              </a:rPr>
-              <a:t>Type here — keep the label line above.</a:t>
-            </a:r>
-          </a:p>
-        </p:txBody>
-      </p:sp>
-      <p:sp>
-        <p:nvSpPr>
-          <p:cNvPr id="24" name="cover.status"/>
-          <p:cNvSpPr/>
-          <p:nvPr>
-            <p:ph type="body" idx="14"/>
-          </p:nvPr>
-        </p:nvSpPr>
-        <p:spPr>
-          <a:xfrm>
-            <a:off x="457200" y="4846320"/>
-            <a:ext cx="7040880" cy="640080"/>
-          </a:xfrm>
-          <a:prstGeom prst="rect">
-            <a:avLst/>
-          </a:prstGeom>
-          <a:noFill/>
-        </p:spPr>
-        <p:txBody>
-          <a:bodyPr wrap="square" lIns="109728" rIns="109728" tIns="64008" anchor="t">
-            <a:normAutofit/>
-          </a:bodyPr>
-          <a:lstStyle>
-            <a:lvl1pPr marL="0" indent="0">
-              <a:spcBef>
-                <a:spcPts val="200"/>
-              </a:spcBef>
-              <a:buNone/>
-              <a:defRPr sz="1400" b="0">
-                <a:solidFill>
-                  <a:srgbClr val="1F2A37"/>
-                </a:solidFill>
-                <a:latin typeface="Calibri"/>
-              </a:defRPr>
-            </a:lvl1pPr>
-            <a:lvl2pPr marL="228600" indent="-228600">
-              <a:buChar char="•"/>
-              <a:defRPr sz="1400">
-                <a:latin typeface="Calibri"/>
-              </a:defRPr>
-            </a:lvl2pPr>
-          </a:lstStyle>
-          <a:p>
-            <a:r>
-              <a:rPr sz="900" b="1" i="0" spc="60">
-                <a:solidFill>
-                  <a:srgbClr val="0271CE"/>
-                </a:solidFill>
-                <a:latin typeface="Calibri"/>
-              </a:rPr>
-              <a:t>STATUS</a:t>
-            </a:r>
-          </a:p>
-          <a:p>
-            <a:r>
-              <a:rPr sz="1400" b="0" i="1">
                 <a:solidFill>
                   <a:srgbClr val="6B7785"/>
                 </a:solidFill>
@@ -1794,7 +1218,7 @@
         <p:spPr>
           <a:xfrm>
             <a:off x="457200" y="1097280"/>
-            <a:ext cx="5532120" cy="1143000"/>
+            <a:ext cx="5532120" cy="5349240"/>
           </a:xfrm>
           <a:prstGeom prst="roundRect">
             <a:avLst>
@@ -1838,7 +1262,7 @@
         <p:spPr>
           <a:xfrm>
             <a:off x="6199632" y="1097280"/>
-            <a:ext cx="5532120" cy="1143000"/>
+            <a:ext cx="5532120" cy="5349240"/>
           </a:xfrm>
           <a:prstGeom prst="roundRect">
             <a:avLst>
@@ -1881,8 +1305,8 @@
         </p:nvSpPr>
         <p:spPr>
           <a:xfrm>
-            <a:off x="457200" y="2468880"/>
-            <a:ext cx="7040880" cy="3977639"/>
+            <a:off x="7871155" y="384048"/>
+            <a:ext cx="3863340" cy="329184"/>
           </a:xfrm>
           <a:prstGeom prst="roundRect">
             <a:avLst>
@@ -1890,7 +1314,7 @@
             </a:avLst>
           </a:prstGeom>
           <a:solidFill>
-            <a:srgbClr val="EEF4FB"/>
+            <a:srgbClr val="E3ECF7"/>
           </a:solidFill>
           <a:ln>
             <a:noFill/>
@@ -1919,102 +1343,14 @@
       </p:sp>
       <p:sp>
         <p:nvSpPr>
-          <p:cNvPr id="6" name="panel"/>
-          <p:cNvSpPr/>
-          <p:nvPr/>
-        </p:nvSpPr>
-        <p:spPr>
-          <a:xfrm>
-            <a:off x="7708392" y="2468880"/>
-            <a:ext cx="4023360" cy="3977639"/>
-          </a:xfrm>
-          <a:prstGeom prst="roundRect">
-            <a:avLst>
-              <a:gd name="adj" fmla="val 4500"/>
-            </a:avLst>
-          </a:prstGeom>
-          <a:solidFill>
-            <a:srgbClr val="EEF4FB"/>
-          </a:solidFill>
-          <a:ln>
-            <a:noFill/>
-          </a:ln>
-          <a:effectLst/>
-        </p:spPr>
-        <p:style>
-          <a:lnRef idx="1">
-            <a:schemeClr val="accent1"/>
-          </a:lnRef>
-          <a:fillRef idx="3">
-            <a:schemeClr val="accent1"/>
-          </a:fillRef>
-          <a:effectRef idx="2">
-            <a:schemeClr val="accent1"/>
-          </a:effectRef>
-          <a:fontRef idx="minor">
-            <a:schemeClr val="lt1"/>
-          </a:fontRef>
-        </p:style>
-        <p:txBody>
-          <a:bodyPr rtlCol="0" anchor="ctr"/>
-          <a:lstStyle/>
-          <a:p/>
-        </p:txBody>
-      </p:sp>
-      <p:sp>
-        <p:nvSpPr>
-          <p:cNvPr id="7" name="panel"/>
-          <p:cNvSpPr/>
-          <p:nvPr/>
-        </p:nvSpPr>
-        <p:spPr>
-          <a:xfrm>
-            <a:off x="7249363" y="384048"/>
-            <a:ext cx="4485132" cy="329184"/>
-          </a:xfrm>
-          <a:prstGeom prst="roundRect">
-            <a:avLst>
-              <a:gd name="adj" fmla="val 4500"/>
-            </a:avLst>
-          </a:prstGeom>
-          <a:solidFill>
-            <a:srgbClr val="E3ECF7"/>
-          </a:solidFill>
-          <a:ln>
-            <a:noFill/>
-          </a:ln>
-          <a:effectLst/>
-        </p:spPr>
-        <p:style>
-          <a:lnRef idx="1">
-            <a:schemeClr val="accent1"/>
-          </a:lnRef>
-          <a:fillRef idx="3">
-            <a:schemeClr val="accent1"/>
-          </a:fillRef>
-          <a:effectRef idx="2">
-            <a:schemeClr val="accent1"/>
-          </a:effectRef>
-          <a:fontRef idx="minor">
-            <a:schemeClr val="lt1"/>
-          </a:fontRef>
-        </p:style>
-        <p:txBody>
-          <a:bodyPr rtlCol="0" anchor="ctr"/>
-          <a:lstStyle/>
-          <a:p/>
-        </p:txBody>
-      </p:sp>
-      <p:sp>
-        <p:nvSpPr>
-          <p:cNvPr id="8" name="chip"/>
+          <p:cNvPr id="6" name="chip"/>
           <p:cNvSpPr txBox="1"/>
           <p:nvPr/>
         </p:nvSpPr>
         <p:spPr>
           <a:xfrm>
-            <a:off x="7249363" y="384048"/>
-            <a:ext cx="4485132" cy="329184"/>
+            <a:off x="7871155" y="384048"/>
+            <a:ext cx="3863340" cy="329184"/>
           </a:xfrm>
           <a:prstGeom prst="rect">
             <a:avLst/>
@@ -2034,20 +1370,20 @@
                 </a:solidFill>
                 <a:latin typeface="Calibri"/>
               </a:rPr>
-              <a:t>Wizard step 1 · The brief  →  Editor · Basics + Steps</a:t>
-            </a:r>
-          </a:p>
-        </p:txBody>
-      </p:sp>
-      <p:sp>
-        <p:nvSpPr>
-          <p:cNvPr id="9" name="help"/>
+              <a:t>Wizard step 1 · The brief  →  Editor · Basics</a:t>
+            </a:r>
+          </a:p>
+        </p:txBody>
+      </p:sp>
+      <p:sp>
+        <p:nvSpPr>
+          <p:cNvPr id="7" name="help"/>
           <p:cNvSpPr txBox="1"/>
           <p:nvPr/>
         </p:nvSpPr>
         <p:spPr>
           <a:xfrm>
-            <a:off x="457200" y="1965960"/>
+            <a:off x="457200" y="6172200"/>
             <a:ext cx="5532120" cy="274320"/>
           </a:xfrm>
           <a:prstGeom prst="rect">
@@ -2075,13 +1411,13 @@
       </p:sp>
       <p:sp>
         <p:nvSpPr>
-          <p:cNvPr id="10" name="help"/>
+          <p:cNvPr id="8" name="help"/>
           <p:cNvSpPr txBox="1"/>
           <p:nvPr/>
         </p:nvSpPr>
         <p:spPr>
           <a:xfrm>
-            <a:off x="6199632" y="1965960"/>
+            <a:off x="6199632" y="6172200"/>
             <a:ext cx="5532120" cy="274320"/>
           </a:xfrm>
           <a:prstGeom prst="rect">
@@ -2109,75 +1445,7 @@
       </p:sp>
       <p:sp>
         <p:nvSpPr>
-          <p:cNvPr id="11" name="help"/>
-          <p:cNvSpPr txBox="1"/>
-          <p:nvPr/>
-        </p:nvSpPr>
-        <p:spPr>
-          <a:xfrm>
-            <a:off x="457200" y="6172200"/>
-            <a:ext cx="7040880" cy="274320"/>
-          </a:xfrm>
-          <a:prstGeom prst="rect">
-            <a:avLst/>
-          </a:prstGeom>
-          <a:noFill/>
-        </p:spPr>
-        <p:txBody>
-          <a:bodyPr wrap="square" lIns="109728" rIns="109728" tIns="27432" bIns="27432" anchor="ctr">
-            <a:spAutoFit/>
-          </a:bodyPr>
-          <a:lstStyle/>
-          <a:p>
-            <a:r>
-              <a:rPr sz="750" b="0" i="1">
-                <a:solidFill>
-                  <a:srgbClr val="6B7785"/>
-                </a:solidFill>
-                <a:latin typeface="Calibri"/>
-              </a:rPr>
-              <a:t>coach: / roleplay: / observe: then what happens, e.g. “coach: does this qualify as harassment?”  → wizard: The steps</a:t>
-            </a:r>
-          </a:p>
-        </p:txBody>
-      </p:sp>
-      <p:sp>
-        <p:nvSpPr>
-          <p:cNvPr id="12" name="help"/>
-          <p:cNvSpPr txBox="1"/>
-          <p:nvPr/>
-        </p:nvSpPr>
-        <p:spPr>
-          <a:xfrm>
-            <a:off x="7708392" y="6172200"/>
-            <a:ext cx="4023360" cy="274320"/>
-          </a:xfrm>
-          <a:prstGeom prst="rect">
-            <a:avLst/>
-          </a:prstGeom>
-          <a:noFill/>
-        </p:spPr>
-        <p:txBody>
-          <a:bodyPr wrap="square" lIns="109728" rIns="109728" tIns="27432" bIns="27432" anchor="ctr">
-            <a:spAutoFit/>
-          </a:bodyPr>
-          <a:lstStyle/>
-          <a:p>
-            <a:r>
-              <a:rPr sz="750" b="0" i="1">
-                <a:solidFill>
-                  <a:srgbClr val="6B7785"/>
-                </a:solidFill>
-                <a:latin typeface="Calibri"/>
-              </a:rPr>
-              <a:t>Course file, slide numbers, policies. Paste the text on a SOURCE MATERIAL slide.</a:t>
-            </a:r>
-          </a:p>
-        </p:txBody>
-      </p:sp>
-      <p:sp>
-        <p:nvSpPr>
-          <p:cNvPr id="13" name="footer"/>
+          <p:cNvPr id="9" name="footer"/>
           <p:cNvSpPr txBox="1"/>
           <p:nvPr/>
         </p:nvSpPr>
@@ -2220,7 +1488,7 @@
       </p:sp>
       <p:sp>
         <p:nvSpPr>
-          <p:cNvPr id="14" name="footer"/>
+          <p:cNvPr id="10" name="footer"/>
           <p:cNvSpPr txBox="1"/>
           <p:nvPr/>
         </p:nvSpPr>
@@ -2254,7 +1522,7 @@
       </p:sp>
       <p:sp>
         <p:nvSpPr>
-          <p:cNvPr id="15" name="title"/>
+          <p:cNvPr id="11" name="title"/>
           <p:cNvSpPr/>
           <p:nvPr>
             <p:ph type="title"/>
@@ -2263,7 +1531,7 @@
         <p:spPr>
           <a:xfrm>
             <a:off x="457200" y="274320"/>
-            <a:ext cx="6609283" cy="640080"/>
+            <a:ext cx="7231075" cy="640080"/>
           </a:xfrm>
           <a:prstGeom prst="rect">
             <a:avLst/>
@@ -2303,7 +1571,7 @@
       </p:sp>
       <p:sp>
         <p:nvSpPr>
-          <p:cNvPr id="16" name="brief.topic"/>
+          <p:cNvPr id="12" name="brief.topic"/>
           <p:cNvSpPr/>
           <p:nvPr>
             <p:ph type="body" idx="10"/>
@@ -2312,7 +1580,7 @@
         <p:spPr>
           <a:xfrm>
             <a:off x="457200" y="1097280"/>
-            <a:ext cx="5532120" cy="868680"/>
+            <a:ext cx="5532120" cy="5074920"/>
           </a:xfrm>
           <a:prstGeom prst="rect">
             <a:avLst/>
@@ -2369,7 +1637,7 @@
       </p:sp>
       <p:sp>
         <p:nvSpPr>
-          <p:cNvPr id="17" name="brief.learner"/>
+          <p:cNvPr id="13" name="brief.learner"/>
           <p:cNvSpPr/>
           <p:nvPr>
             <p:ph type="body" idx="11"/>
@@ -2378,7 +1646,7 @@
         <p:spPr>
           <a:xfrm>
             <a:off x="6199632" y="1097280"/>
-            <a:ext cx="5532120" cy="868680"/>
+            <a:ext cx="5532120" cy="5074920"/>
           </a:xfrm>
           <a:prstGeom prst="rect">
             <a:avLst/>
@@ -2418,138 +1686,6 @@
                 <a:latin typeface="Calibri"/>
               </a:rPr>
               <a:t>THE LEARNER PLAYS</a:t>
-            </a:r>
-          </a:p>
-          <a:p>
-            <a:r>
-              <a:rPr sz="1200" b="0" i="1">
-                <a:solidFill>
-                  <a:srgbClr val="6B7785"/>
-                </a:solidFill>
-                <a:latin typeface="Calibri"/>
-              </a:rPr>
-              <a:t>Type here — keep the label line above.</a:t>
-            </a:r>
-          </a:p>
-        </p:txBody>
-      </p:sp>
-      <p:sp>
-        <p:nvSpPr>
-          <p:cNvPr id="18" name="brief.steps"/>
-          <p:cNvSpPr/>
-          <p:nvPr>
-            <p:ph type="body" idx="12"/>
-          </p:nvPr>
-        </p:nvSpPr>
-        <p:spPr>
-          <a:xfrm>
-            <a:off x="457200" y="2468880"/>
-            <a:ext cx="7040880" cy="3703320"/>
-          </a:xfrm>
-          <a:prstGeom prst="rect">
-            <a:avLst/>
-          </a:prstGeom>
-          <a:noFill/>
-        </p:spPr>
-        <p:txBody>
-          <a:bodyPr wrap="square" lIns="109728" rIns="109728" tIns="64008" anchor="t">
-            <a:normAutofit/>
-          </a:bodyPr>
-          <a:lstStyle>
-            <a:lvl1pPr marL="0" indent="0">
-              <a:spcBef>
-                <a:spcPts val="200"/>
-              </a:spcBef>
-              <a:buNone/>
-              <a:defRPr sz="1200" b="0">
-                <a:solidFill>
-                  <a:srgbClr val="1F2A37"/>
-                </a:solidFill>
-                <a:latin typeface="Calibri"/>
-              </a:defRPr>
-            </a:lvl1pPr>
-            <a:lvl2pPr marL="228600" indent="-228600">
-              <a:buChar char="•"/>
-              <a:defRPr sz="1200">
-                <a:latin typeface="Calibri"/>
-              </a:defRPr>
-            </a:lvl2pPr>
-          </a:lstStyle>
-          <a:p>
-            <a:r>
-              <a:rPr sz="900" b="1" i="0" spc="60">
-                <a:solidFill>
-                  <a:srgbClr val="0271CE"/>
-                </a:solidFill>
-                <a:latin typeface="Calibri"/>
-              </a:rPr>
-              <a:t>STEPS, IN ORDER — ONE PER LINE, EACH STARTING WITH ITS MODE</a:t>
-            </a:r>
-          </a:p>
-          <a:p>
-            <a:r>
-              <a:rPr sz="1200" b="0" i="1">
-                <a:solidFill>
-                  <a:srgbClr val="6B7785"/>
-                </a:solidFill>
-                <a:latin typeface="Calibri"/>
-              </a:rPr>
-              <a:t>Type here — keep the label line above.</a:t>
-            </a:r>
-          </a:p>
-        </p:txBody>
-      </p:sp>
-      <p:sp>
-        <p:nvSpPr>
-          <p:cNvPr id="19" name="brief.sources"/>
-          <p:cNvSpPr/>
-          <p:nvPr>
-            <p:ph type="body" idx="13"/>
-          </p:nvPr>
-        </p:nvSpPr>
-        <p:spPr>
-          <a:xfrm>
-            <a:off x="7708392" y="2468880"/>
-            <a:ext cx="4023360" cy="3703320"/>
-          </a:xfrm>
-          <a:prstGeom prst="rect">
-            <a:avLst/>
-          </a:prstGeom>
-          <a:noFill/>
-        </p:spPr>
-        <p:txBody>
-          <a:bodyPr wrap="square" lIns="109728" rIns="109728" tIns="64008" anchor="t">
-            <a:normAutofit/>
-          </a:bodyPr>
-          <a:lstStyle>
-            <a:lvl1pPr marL="0" indent="0">
-              <a:spcBef>
-                <a:spcPts val="200"/>
-              </a:spcBef>
-              <a:buNone/>
-              <a:defRPr sz="1200" b="0">
-                <a:solidFill>
-                  <a:srgbClr val="1F2A37"/>
-                </a:solidFill>
-                <a:latin typeface="Calibri"/>
-              </a:defRPr>
-            </a:lvl1pPr>
-            <a:lvl2pPr marL="228600" indent="-228600">
-              <a:buChar char="•"/>
-              <a:defRPr sz="1200">
-                <a:latin typeface="Calibri"/>
-              </a:defRPr>
-            </a:lvl2pPr>
-          </a:lstStyle>
-          <a:p>
-            <a:r>
-              <a:rPr sz="900" b="1" i="0" spc="60">
-                <a:solidFill>
-                  <a:srgbClr val="0271CE"/>
-                </a:solidFill>
-                <a:latin typeface="Calibri"/>
-              </a:rPr>
-              <a:t>SOURCE SLIDES OR DOCUMENTS</a:t>
             </a:r>
           </a:p>
           <a:p>
@@ -3279,7 +2415,7 @@
         <p:spPr>
           <a:xfrm>
             <a:off x="457200" y="1097280"/>
-            <a:ext cx="5532120" cy="2743200"/>
+            <a:ext cx="5532120" cy="3566160"/>
           </a:xfrm>
           <a:prstGeom prst="roundRect">
             <a:avLst>
@@ -3322,8 +2458,8 @@
         </p:nvSpPr>
         <p:spPr>
           <a:xfrm>
-            <a:off x="457200" y="4069080"/>
-            <a:ext cx="5532120" cy="2377440"/>
+            <a:off x="457200" y="4892040"/>
+            <a:ext cx="5532120" cy="1554480"/>
           </a:xfrm>
           <a:prstGeom prst="roundRect">
             <a:avLst>
@@ -3532,7 +2668,7 @@
         </p:nvSpPr>
         <p:spPr>
           <a:xfrm>
-            <a:off x="457200" y="3566160"/>
+            <a:off x="457200" y="4389120"/>
             <a:ext cx="5532120" cy="274320"/>
           </a:xfrm>
           <a:prstGeom prst="rect">
@@ -3781,7 +2917,7 @@
                 </a:solidFill>
                 <a:latin typeface="Calibri"/>
               </a:rPr>
-              <a:t>THE TEACHING</a:t>
+              <a:t>CORE TOPICS</a:t>
             </a:r>
           </a:p>
         </p:txBody>
@@ -3797,7 +2933,7 @@
         <p:spPr>
           <a:xfrm>
             <a:off x="457200" y="1097280"/>
-            <a:ext cx="5532120" cy="2468880"/>
+            <a:ext cx="5532120" cy="3291840"/>
           </a:xfrm>
           <a:prstGeom prst="rect">
             <a:avLst/>
@@ -3836,7 +2972,7 @@
                 </a:solidFill>
                 <a:latin typeface="Calibri"/>
               </a:rPr>
-              <a:t>MUST-KNOWS — 3 TO 6, ONE PER LINE</a:t>
+              <a:t>MUST-KNOWS — ONE PER LINE</a:t>
             </a:r>
           </a:p>
           <a:p>
@@ -3862,8 +2998,8 @@
         </p:nvSpPr>
         <p:spPr>
           <a:xfrm>
-            <a:off x="457200" y="4069080"/>
-            <a:ext cx="5532120" cy="2103120"/>
+            <a:off x="457200" y="4892040"/>
+            <a:ext cx="5532120" cy="1280160"/>
           </a:xfrm>
           <a:prstGeom prst="rect">
             <a:avLst/>
@@ -4522,7 +3658,7 @@
                 </a:solidFill>
                 <a:latin typeface="Calibri"/>
               </a:rPr>
-              <a:t>THE OPENING</a:t>
+              <a:t>INITIAL REFLECTION</a:t>
             </a:r>
           </a:p>
         </p:txBody>
@@ -4709,7 +3845,7 @@
                 </a:solidFill>
                 <a:latin typeface="Calibri"/>
               </a:rPr>
-              <a:t>LISTEN FOR — AND HOW TO ACKNOWLEDGE IT</a:t>
+              <a:t>LISTEN FOR</a:t>
             </a:r>
           </a:p>
           <a:p>
@@ -4764,7 +3900,7 @@
         <p:spPr>
           <a:xfrm>
             <a:off x="457200" y="1097280"/>
-            <a:ext cx="2103120" cy="658368"/>
+            <a:ext cx="2103120" cy="704088"/>
           </a:xfrm>
           <a:prstGeom prst="roundRect">
             <a:avLst>
@@ -4808,7 +3944,7 @@
         <p:spPr>
           <a:xfrm>
             <a:off x="2706624" y="1097280"/>
-            <a:ext cx="2103120" cy="658368"/>
+            <a:ext cx="2103120" cy="704088"/>
           </a:xfrm>
           <a:prstGeom prst="roundRect">
             <a:avLst>
@@ -4852,7 +3988,7 @@
         <p:spPr>
           <a:xfrm>
             <a:off x="4956048" y="1097280"/>
-            <a:ext cx="1005840" cy="658368"/>
+            <a:ext cx="1005840" cy="704088"/>
           </a:xfrm>
           <a:prstGeom prst="roundRect">
             <a:avLst>
@@ -5237,7 +4373,7 @@
         </p:nvSpPr>
         <p:spPr>
           <a:xfrm>
-            <a:off x="457200" y="1481328"/>
+            <a:off x="457200" y="1527048"/>
             <a:ext cx="2103120" cy="274320"/>
           </a:xfrm>
           <a:prstGeom prst="rect">
@@ -5271,7 +4407,7 @@
         </p:nvSpPr>
         <p:spPr>
           <a:xfrm>
-            <a:off x="2706624" y="1481328"/>
+            <a:off x="2706624" y="1527048"/>
             <a:ext cx="2103120" cy="274320"/>
           </a:xfrm>
           <a:prstGeom prst="rect">
@@ -5305,7 +4441,7 @@
         </p:nvSpPr>
         <p:spPr>
           <a:xfrm>
-            <a:off x="4956048" y="1481328"/>
+            <a:off x="4956048" y="1527048"/>
             <a:ext cx="1005840" cy="274320"/>
           </a:xfrm>
           <a:prstGeom prst="rect">
@@ -5681,7 +4817,73 @@
         <p:spPr>
           <a:xfrm>
             <a:off x="457200" y="1097280"/>
-            <a:ext cx="2103120" cy="384048"/>
+            <a:ext cx="2103120" cy="429768"/>
+          </a:xfrm>
+          <a:prstGeom prst="rect">
+            <a:avLst/>
+          </a:prstGeom>
+          <a:noFill/>
+        </p:spPr>
+        <p:txBody>
+          <a:bodyPr wrap="square" lIns="109728" rIns="109728" tIns="64008" anchor="t">
+            <a:normAutofit/>
+          </a:bodyPr>
+          <a:lstStyle>
+            <a:lvl1pPr marL="0" indent="0">
+              <a:spcBef>
+                <a:spcPts val="200"/>
+              </a:spcBef>
+              <a:buNone/>
+              <a:defRPr sz="1600" b="0">
+                <a:solidFill>
+                  <a:srgbClr val="1F2A37"/>
+                </a:solidFill>
+                <a:latin typeface="Calibri"/>
+              </a:defRPr>
+            </a:lvl1pPr>
+            <a:lvl2pPr marL="228600" indent="-228600">
+              <a:buChar char="•"/>
+              <a:defRPr sz="1600">
+                <a:latin typeface="Calibri"/>
+              </a:defRPr>
+            </a:lvl2pPr>
+          </a:lstStyle>
+          <a:p>
+            <a:r>
+              <a:rPr sz="900" b="1" i="0" spc="60">
+                <a:solidFill>
+                  <a:srgbClr val="0271CE"/>
+                </a:solidFill>
+                <a:latin typeface="Calibri"/>
+              </a:rPr>
+              <a:t>MODE</a:t>
+            </a:r>
+          </a:p>
+          <a:p>
+            <a:r>
+              <a:rPr sz="1600" b="0" i="1">
+                <a:solidFill>
+                  <a:srgbClr val="6B7785"/>
+                </a:solidFill>
+                <a:latin typeface="Calibri"/>
+              </a:rPr>
+              <a:t>Type here — keep the label line above.</a:t>
+            </a:r>
+          </a:p>
+        </p:txBody>
+      </p:sp>
+      <p:sp>
+        <p:nvSpPr>
+          <p:cNvPr id="27" name="step.right"/>
+          <p:cNvSpPr/>
+          <p:nvPr>
+            <p:ph type="body" idx="11"/>
+          </p:nvPr>
+        </p:nvSpPr>
+        <p:spPr>
+          <a:xfrm>
+            <a:off x="2706624" y="1097280"/>
+            <a:ext cx="2103120" cy="429768"/>
           </a:xfrm>
           <a:prstGeom prst="rect">
             <a:avLst/>
@@ -5720,7 +4922,7 @@
                 </a:solidFill>
                 <a:latin typeface="Calibri"/>
               </a:rPr>
-              <a:t>MODE</a:t>
+              <a:t>IS THERE A RIGHT ANSWER?</a:t>
             </a:r>
           </a:p>
           <a:p>
@@ -5738,16 +4940,16 @@
       </p:sp>
       <p:sp>
         <p:nvSpPr>
-          <p:cNvPr id="27" name="step.right"/>
+          <p:cNvPr id="28" name="step.turns"/>
           <p:cNvSpPr/>
           <p:nvPr>
-            <p:ph type="body" idx="11"/>
+            <p:ph type="body" idx="12"/>
           </p:nvPr>
         </p:nvSpPr>
         <p:spPr>
           <a:xfrm>
-            <a:off x="2706624" y="1097280"/>
-            <a:ext cx="2103120" cy="384048"/>
+            <a:off x="4956048" y="1097280"/>
+            <a:ext cx="1005840" cy="429768"/>
           </a:xfrm>
           <a:prstGeom prst="rect">
             <a:avLst/>
@@ -5786,72 +4988,6 @@
                 </a:solidFill>
                 <a:latin typeface="Calibri"/>
               </a:rPr>
-              <a:t>RIGHT ANSWER?</a:t>
-            </a:r>
-          </a:p>
-          <a:p>
-            <a:r>
-              <a:rPr sz="1100" b="0" i="1">
-                <a:solidFill>
-                  <a:srgbClr val="6B7785"/>
-                </a:solidFill>
-                <a:latin typeface="Calibri"/>
-              </a:rPr>
-              <a:t>Type here — keep the label line above.</a:t>
-            </a:r>
-          </a:p>
-        </p:txBody>
-      </p:sp>
-      <p:sp>
-        <p:nvSpPr>
-          <p:cNvPr id="28" name="step.turns"/>
-          <p:cNvSpPr/>
-          <p:nvPr>
-            <p:ph type="body" idx="12"/>
-          </p:nvPr>
-        </p:nvSpPr>
-        <p:spPr>
-          <a:xfrm>
-            <a:off x="4956048" y="1097280"/>
-            <a:ext cx="1005840" cy="384048"/>
-          </a:xfrm>
-          <a:prstGeom prst="rect">
-            <a:avLst/>
-          </a:prstGeom>
-          <a:noFill/>
-        </p:spPr>
-        <p:txBody>
-          <a:bodyPr wrap="square" lIns="109728" rIns="109728" tIns="64008" anchor="t">
-            <a:normAutofit/>
-          </a:bodyPr>
-          <a:lstStyle>
-            <a:lvl1pPr marL="0" indent="0">
-              <a:spcBef>
-                <a:spcPts val="200"/>
-              </a:spcBef>
-              <a:buNone/>
-              <a:defRPr sz="1100" b="0">
-                <a:solidFill>
-                  <a:srgbClr val="1F2A37"/>
-                </a:solidFill>
-                <a:latin typeface="Calibri"/>
-              </a:defRPr>
-            </a:lvl1pPr>
-            <a:lvl2pPr marL="228600" indent="-228600">
-              <a:buChar char="•"/>
-              <a:defRPr sz="1100">
-                <a:latin typeface="Calibri"/>
-              </a:defRPr>
-            </a:lvl2pPr>
-          </a:lstStyle>
-          <a:p>
-            <a:r>
-              <a:rPr sz="900" b="1" i="0" spc="60">
-                <a:solidFill>
-                  <a:srgbClr val="0271CE"/>
-                </a:solidFill>
-                <a:latin typeface="Calibri"/>
-              </a:rPr>
               <a:t>TURNS</a:t>
             </a:r>
           </a:p>
@@ -6050,7 +5186,7 @@
                 </a:solidFill>
                 <a:latin typeface="Calibri"/>
               </a:rPr>
-              <a:t>UNTHOUGHTFUL</a:t>
+              <a:t>RESPONSE: UNTHOUGHTFUL</a:t>
             </a:r>
           </a:p>
           <a:p>
@@ -6116,7 +5252,7 @@
                 </a:solidFill>
                 <a:latin typeface="Calibri"/>
               </a:rPr>
-              <a:t>NEUTRAL</a:t>
+              <a:t>RESPONSE: NEUTRAL</a:t>
             </a:r>
           </a:p>
           <a:p>
@@ -6182,7 +5318,7 @@
                 </a:solidFill>
                 <a:latin typeface="Calibri"/>
               </a:rPr>
-              <a:t>STRONG</a:t>
+              <a:t>RESPONSE: STRONG</a:t>
             </a:r>
           </a:p>
           <a:p>
@@ -6248,7 +5384,7 @@
                 </a:solidFill>
                 <a:latin typeface="Calibri"/>
               </a:rPr>
-              <a:t>DEBRIEF LANDS — 2 TO 4 POINTS EVERY LEARNER HEARS, HOWEVER THE ATTEMPT WENT</a:t>
+              <a:t>DEBRIEF — 2 TO 4 POINTS EVERY LEARNER HEARS, HOWEVER THE ATTEMPT WENT</a:t>
             </a:r>
           </a:p>
           <a:p>
@@ -6782,7 +5918,7 @@
                 </a:solidFill>
                 <a:latin typeface="Calibri"/>
               </a:rPr>
-              <a:t>UNTHOUGHTFUL</a:t>
+              <a:t>EXAMPLE RESPONSE: UNTHOUGHTFUL</a:t>
             </a:r>
           </a:p>
           <a:p>
@@ -6848,7 +5984,7 @@
                 </a:solidFill>
                 <a:latin typeface="Calibri"/>
               </a:rPr>
-              <a:t>NEUTRAL</a:t>
+              <a:t>EXAMPLE RESPONSE: NEUTRAL</a:t>
             </a:r>
           </a:p>
           <a:p>
@@ -6914,7 +6050,7 @@
                 </a:solidFill>
                 <a:latin typeface="Calibri"/>
               </a:rPr>
-              <a:t>STRONG</a:t>
+              <a:t>EXAMPLE RESPONSE: STRONG</a:t>
             </a:r>
           </a:p>
           <a:p>
@@ -7013,7 +6149,7 @@
         <p:spPr>
           <a:xfrm>
             <a:off x="6199632" y="1097280"/>
-            <a:ext cx="5532120" cy="3063240"/>
+            <a:ext cx="5532120" cy="5349240"/>
           </a:xfrm>
           <a:prstGeom prst="roundRect">
             <a:avLst>
@@ -7056,8 +6192,8 @@
         </p:nvSpPr>
         <p:spPr>
           <a:xfrm>
-            <a:off x="6199632" y="4389120"/>
-            <a:ext cx="2651760" cy="2057400"/>
+            <a:off x="7249363" y="384048"/>
+            <a:ext cx="4485132" cy="329184"/>
           </a:xfrm>
           <a:prstGeom prst="roundRect">
             <a:avLst>
@@ -7065,7 +6201,7 @@
             </a:avLst>
           </a:prstGeom>
           <a:solidFill>
-            <a:srgbClr val="EEF4FB"/>
+            <a:srgbClr val="E3ECF7"/>
           </a:solidFill>
           <a:ln>
             <a:noFill/>
@@ -7094,95 +6230,7 @@
       </p:sp>
       <p:sp>
         <p:nvSpPr>
-          <p:cNvPr id="6" name="panel"/>
-          <p:cNvSpPr/>
-          <p:nvPr/>
-        </p:nvSpPr>
-        <p:spPr>
-          <a:xfrm>
-            <a:off x="9079992" y="4389120"/>
-            <a:ext cx="2651760" cy="2057400"/>
-          </a:xfrm>
-          <a:prstGeom prst="roundRect">
-            <a:avLst>
-              <a:gd name="adj" fmla="val 4500"/>
-            </a:avLst>
-          </a:prstGeom>
-          <a:solidFill>
-            <a:srgbClr val="EEF4FB"/>
-          </a:solidFill>
-          <a:ln>
-            <a:noFill/>
-          </a:ln>
-          <a:effectLst/>
-        </p:spPr>
-        <p:style>
-          <a:lnRef idx="1">
-            <a:schemeClr val="accent1"/>
-          </a:lnRef>
-          <a:fillRef idx="3">
-            <a:schemeClr val="accent1"/>
-          </a:fillRef>
-          <a:effectRef idx="2">
-            <a:schemeClr val="accent1"/>
-          </a:effectRef>
-          <a:fontRef idx="minor">
-            <a:schemeClr val="lt1"/>
-          </a:fontRef>
-        </p:style>
-        <p:txBody>
-          <a:bodyPr rtlCol="0" anchor="ctr"/>
-          <a:lstStyle/>
-          <a:p/>
-        </p:txBody>
-      </p:sp>
-      <p:sp>
-        <p:nvSpPr>
-          <p:cNvPr id="7" name="panel"/>
-          <p:cNvSpPr/>
-          <p:nvPr/>
-        </p:nvSpPr>
-        <p:spPr>
-          <a:xfrm>
-            <a:off x="7249363" y="384048"/>
-            <a:ext cx="4485132" cy="329184"/>
-          </a:xfrm>
-          <a:prstGeom prst="roundRect">
-            <a:avLst>
-              <a:gd name="adj" fmla="val 4500"/>
-            </a:avLst>
-          </a:prstGeom>
-          <a:solidFill>
-            <a:srgbClr val="E3ECF7"/>
-          </a:solidFill>
-          <a:ln>
-            <a:noFill/>
-          </a:ln>
-          <a:effectLst/>
-        </p:spPr>
-        <p:style>
-          <a:lnRef idx="1">
-            <a:schemeClr val="accent1"/>
-          </a:lnRef>
-          <a:fillRef idx="3">
-            <a:schemeClr val="accent1"/>
-          </a:fillRef>
-          <a:effectRef idx="2">
-            <a:schemeClr val="accent1"/>
-          </a:effectRef>
-          <a:fontRef idx="minor">
-            <a:schemeClr val="lt1"/>
-          </a:fontRef>
-        </p:style>
-        <p:txBody>
-          <a:bodyPr rtlCol="0" anchor="ctr"/>
-          <a:lstStyle/>
-          <a:p/>
-        </p:txBody>
-      </p:sp>
-      <p:sp>
-        <p:nvSpPr>
-          <p:cNvPr id="8" name="chip"/>
+          <p:cNvPr id="6" name="chip"/>
           <p:cNvSpPr txBox="1"/>
           <p:nvPr/>
         </p:nvSpPr>
@@ -7216,7 +6264,7 @@
       </p:sp>
       <p:sp>
         <p:nvSpPr>
-          <p:cNvPr id="9" name="help"/>
+          <p:cNvPr id="7" name="help"/>
           <p:cNvSpPr txBox="1"/>
           <p:nvPr/>
         </p:nvSpPr>
@@ -7250,13 +6298,13 @@
       </p:sp>
       <p:sp>
         <p:nvSpPr>
-          <p:cNvPr id="10" name="help"/>
+          <p:cNvPr id="8" name="help"/>
           <p:cNvSpPr txBox="1"/>
           <p:nvPr/>
         </p:nvSpPr>
         <p:spPr>
           <a:xfrm>
-            <a:off x="6199632" y="3886200"/>
+            <a:off x="6199632" y="6172200"/>
             <a:ext cx="5532120" cy="274320"/>
           </a:xfrm>
           <a:prstGeom prst="rect">
@@ -7293,75 +6341,7 @@
       </p:sp>
       <p:sp>
         <p:nvSpPr>
-          <p:cNvPr id="11" name="help"/>
-          <p:cNvSpPr txBox="1"/>
-          <p:nvPr/>
-        </p:nvSpPr>
-        <p:spPr>
-          <a:xfrm>
-            <a:off x="6199632" y="6172200"/>
-            <a:ext cx="2651760" cy="274320"/>
-          </a:xfrm>
-          <a:prstGeom prst="rect">
-            <a:avLst/>
-          </a:prstGeom>
-          <a:noFill/>
-        </p:spPr>
-        <p:txBody>
-          <a:bodyPr wrap="square" lIns="109728" rIns="109728" tIns="27432" bIns="27432" anchor="ctr">
-            <a:spAutoFit/>
-          </a:bodyPr>
-          <a:lstStyle/>
-          <a:p>
-            <a:r>
-              <a:rPr sz="750" b="0" i="1">
-                <a:solidFill>
-                  <a:srgbClr val="6B7785"/>
-                </a:solidFill>
-                <a:latin typeface="Calibri"/>
-              </a:rPr>
-              <a:t>Regulations, standards only. Ships to the learner.</a:t>
-            </a:r>
-          </a:p>
-        </p:txBody>
-      </p:sp>
-      <p:sp>
-        <p:nvSpPr>
-          <p:cNvPr id="12" name="help"/>
-          <p:cNvSpPr txBox="1"/>
-          <p:nvPr/>
-        </p:nvSpPr>
-        <p:spPr>
-          <a:xfrm>
-            <a:off x="9079992" y="6172200"/>
-            <a:ext cx="2651760" cy="274320"/>
-          </a:xfrm>
-          <a:prstGeom prst="rect">
-            <a:avLst/>
-          </a:prstGeom>
-          <a:noFill/>
-        </p:spPr>
-        <p:txBody>
-          <a:bodyPr wrap="square" lIns="109728" rIns="109728" tIns="27432" bIns="27432" anchor="ctr">
-            <a:spAutoFit/>
-          </a:bodyPr>
-          <a:lstStyle/>
-          <a:p>
-            <a:r>
-              <a:rPr sz="750" b="0" i="1">
-                <a:solidFill>
-                  <a:srgbClr val="6B7785"/>
-                </a:solidFill>
-                <a:latin typeface="Calibri"/>
-              </a:rPr>
-              <a:t>Course slide numbers. Never ships.</a:t>
-            </a:r>
-          </a:p>
-        </p:txBody>
-      </p:sp>
-      <p:sp>
-        <p:nvSpPr>
-          <p:cNvPr id="13" name="footer"/>
+          <p:cNvPr id="9" name="footer"/>
           <p:cNvSpPr txBox="1"/>
           <p:nvPr/>
         </p:nvSpPr>
@@ -7404,7 +6384,7 @@
       </p:sp>
       <p:sp>
         <p:nvSpPr>
-          <p:cNvPr id="14" name="footer"/>
+          <p:cNvPr id="10" name="footer"/>
           <p:cNvSpPr txBox="1"/>
           <p:nvPr/>
         </p:nvSpPr>
@@ -7438,7 +6418,7 @@
       </p:sp>
       <p:sp>
         <p:nvSpPr>
-          <p:cNvPr id="15" name="title"/>
+          <p:cNvPr id="11" name="title"/>
           <p:cNvSpPr/>
           <p:nvPr>
             <p:ph type="title"/>
@@ -7487,7 +6467,7 @@
       </p:sp>
       <p:sp>
         <p:nvSpPr>
-          <p:cNvPr id="16" name="close.components"/>
+          <p:cNvPr id="12" name="close.components"/>
           <p:cNvSpPr/>
           <p:nvPr>
             <p:ph type="body" idx="10"/>
@@ -7553,7 +6533,7 @@
       </p:sp>
       <p:sp>
         <p:nvSpPr>
-          <p:cNvPr id="17" name="close.summary"/>
+          <p:cNvPr id="13" name="close.summary"/>
           <p:cNvSpPr/>
           <p:nvPr>
             <p:ph type="body" idx="11"/>
@@ -7562,7 +6542,7 @@
         <p:spPr>
           <a:xfrm>
             <a:off x="6199632" y="1097280"/>
-            <a:ext cx="5532120" cy="2788920"/>
+            <a:ext cx="5532120" cy="5074920"/>
           </a:xfrm>
           <a:prstGeom prst="rect">
             <a:avLst/>
@@ -7607,138 +6587,6 @@
           <a:p>
             <a:r>
               <a:rPr sz="1100" b="0" i="1">
-                <a:solidFill>
-                  <a:srgbClr val="6B7785"/>
-                </a:solidFill>
-                <a:latin typeface="Calibri"/>
-              </a:rPr>
-              <a:t>Type here — keep the label line above.</a:t>
-            </a:r>
-          </a:p>
-        </p:txBody>
-      </p:sp>
-      <p:sp>
-        <p:nvSpPr>
-          <p:cNvPr id="18" name="close.authorities"/>
-          <p:cNvSpPr/>
-          <p:nvPr>
-            <p:ph type="body" idx="12"/>
-          </p:nvPr>
-        </p:nvSpPr>
-        <p:spPr>
-          <a:xfrm>
-            <a:off x="6199632" y="4389120"/>
-            <a:ext cx="2651760" cy="1783080"/>
-          </a:xfrm>
-          <a:prstGeom prst="rect">
-            <a:avLst/>
-          </a:prstGeom>
-          <a:noFill/>
-        </p:spPr>
-        <p:txBody>
-          <a:bodyPr wrap="square" lIns="109728" rIns="109728" tIns="64008" anchor="t">
-            <a:normAutofit/>
-          </a:bodyPr>
-          <a:lstStyle>
-            <a:lvl1pPr marL="0" indent="0">
-              <a:spcBef>
-                <a:spcPts val="200"/>
-              </a:spcBef>
-              <a:buNone/>
-              <a:defRPr sz="1000" b="0">
-                <a:solidFill>
-                  <a:srgbClr val="1F2A37"/>
-                </a:solidFill>
-                <a:latin typeface="Calibri"/>
-              </a:defRPr>
-            </a:lvl1pPr>
-            <a:lvl2pPr marL="228600" indent="-228600">
-              <a:buChar char="•"/>
-              <a:defRPr sz="1000">
-                <a:latin typeface="Calibri"/>
-              </a:defRPr>
-            </a:lvl2pPr>
-          </a:lstStyle>
-          <a:p>
-            <a:r>
-              <a:rPr sz="900" b="1" i="0" spc="60">
-                <a:solidFill>
-                  <a:srgbClr val="0271CE"/>
-                </a:solidFill>
-                <a:latin typeface="Calibri"/>
-              </a:rPr>
-              <a:t>EXTERNAL AUTHORITIES</a:t>
-            </a:r>
-          </a:p>
-          <a:p>
-            <a:r>
-              <a:rPr sz="1000" b="0" i="1">
-                <a:solidFill>
-                  <a:srgbClr val="6B7785"/>
-                </a:solidFill>
-                <a:latin typeface="Calibri"/>
-              </a:rPr>
-              <a:t>Type here — keep the label line above.</a:t>
-            </a:r>
-          </a:p>
-        </p:txBody>
-      </p:sp>
-      <p:sp>
-        <p:nvSpPr>
-          <p:cNvPr id="19" name="close.internal"/>
-          <p:cNvSpPr/>
-          <p:nvPr>
-            <p:ph type="body" idx="13"/>
-          </p:nvPr>
-        </p:nvSpPr>
-        <p:spPr>
-          <a:xfrm>
-            <a:off x="9079992" y="4389120"/>
-            <a:ext cx="2651760" cy="1783080"/>
-          </a:xfrm>
-          <a:prstGeom prst="rect">
-            <a:avLst/>
-          </a:prstGeom>
-          <a:noFill/>
-        </p:spPr>
-        <p:txBody>
-          <a:bodyPr wrap="square" lIns="109728" rIns="109728" tIns="64008" anchor="t">
-            <a:normAutofit/>
-          </a:bodyPr>
-          <a:lstStyle>
-            <a:lvl1pPr marL="0" indent="0">
-              <a:spcBef>
-                <a:spcPts val="200"/>
-              </a:spcBef>
-              <a:buNone/>
-              <a:defRPr sz="1000" b="0">
-                <a:solidFill>
-                  <a:srgbClr val="1F2A37"/>
-                </a:solidFill>
-                <a:latin typeface="Calibri"/>
-              </a:defRPr>
-            </a:lvl1pPr>
-            <a:lvl2pPr marL="228600" indent="-228600">
-              <a:buChar char="•"/>
-              <a:defRPr sz="1000">
-                <a:latin typeface="Calibri"/>
-              </a:defRPr>
-            </a:lvl2pPr>
-          </a:lstStyle>
-          <a:p>
-            <a:r>
-              <a:rPr sz="900" b="1" i="0" spc="60">
-                <a:solidFill>
-                  <a:srgbClr val="0271CE"/>
-                </a:solidFill>
-                <a:latin typeface="Calibri"/>
-              </a:rPr>
-              <a:t>INTERNAL SOURCE SLIDES</a:t>
-            </a:r>
-          </a:p>
-          <a:p>
-            <a:r>
-              <a:rPr sz="1000" b="0" i="1">
                 <a:solidFill>
                   <a:srgbClr val="6B7785"/>
                 </a:solidFill>
@@ -8680,7 +7528,7 @@
                 </a:solidFill>
                 <a:latin typeface="Calibri"/>
               </a:rPr>
-              <a:t>SCENARIO BRIEF</a:t>
+              <a:t>SCENARIO BASICS</a:t>
             </a:r>
           </a:p>
         </p:txBody>
@@ -8718,170 +7566,6 @@
           </a:p>
           <a:p>
             <a:endParaRPr sz="2400" b="0" i="0">
-              <a:solidFill>
-                <a:srgbClr val="1F2A37"/>
-              </a:solidFill>
-              <a:latin typeface="Calibri"/>
-            </a:endParaRPr>
-          </a:p>
-        </p:txBody>
-      </p:sp>
-      <p:sp>
-        <p:nvSpPr>
-          <p:cNvPr id="4" name="cover.training"/>
-          <p:cNvSpPr>
-            <a:spLocks noGrp="1"/>
-          </p:cNvSpPr>
-          <p:nvPr>
-            <p:ph type="body" idx="11"/>
-          </p:nvPr>
-        </p:nvSpPr>
-        <p:spPr/>
-        <p:txBody>
-          <a:bodyPr/>
-          <a:lstStyle/>
-          <a:p>
-            <a:r>
-              <a:rPr sz="900" b="1" i="0" spc="60">
-                <a:solidFill>
-                  <a:srgbClr val="0271CE"/>
-                </a:solidFill>
-                <a:latin typeface="Calibri"/>
-              </a:rPr>
-              <a:t>TRAINING IT LIVES INSIDE</a:t>
-            </a:r>
-            <a:endParaRPr sz="1400" b="0" i="0">
-              <a:solidFill>
-                <a:srgbClr val="1F2A37"/>
-              </a:solidFill>
-              <a:latin typeface="Calibri"/>
-            </a:endParaRPr>
-          </a:p>
-          <a:p>
-            <a:endParaRPr sz="1400" b="0" i="0">
-              <a:solidFill>
-                <a:srgbClr val="1F2A37"/>
-              </a:solidFill>
-              <a:latin typeface="Calibri"/>
-            </a:endParaRPr>
-          </a:p>
-        </p:txBody>
-      </p:sp>
-      <p:sp>
-        <p:nvSpPr>
-          <p:cNvPr id="5" name="cover.owner"/>
-          <p:cNvSpPr>
-            <a:spLocks noGrp="1"/>
-          </p:cNvSpPr>
-          <p:nvPr>
-            <p:ph type="body" idx="12"/>
-          </p:nvPr>
-        </p:nvSpPr>
-        <p:spPr/>
-        <p:txBody>
-          <a:bodyPr/>
-          <a:lstStyle/>
-          <a:p>
-            <a:r>
-              <a:rPr sz="900" b="1" i="0" spc="60">
-                <a:solidFill>
-                  <a:srgbClr val="0271CE"/>
-                </a:solidFill>
-                <a:latin typeface="Calibri"/>
-              </a:rPr>
-              <a:t>OWNER</a:t>
-            </a:r>
-            <a:endParaRPr sz="1400" b="0" i="0">
-              <a:solidFill>
-                <a:srgbClr val="1F2A37"/>
-              </a:solidFill>
-              <a:latin typeface="Calibri"/>
-            </a:endParaRPr>
-          </a:p>
-          <a:p>
-            <a:endParaRPr sz="1400" b="0" i="0">
-              <a:solidFill>
-                <a:srgbClr val="1F2A37"/>
-              </a:solidFill>
-              <a:latin typeface="Calibri"/>
-            </a:endParaRPr>
-          </a:p>
-        </p:txBody>
-      </p:sp>
-      <p:sp>
-        <p:nvSpPr>
-          <p:cNvPr id="6" name="cover.version"/>
-          <p:cNvSpPr>
-            <a:spLocks noGrp="1"/>
-          </p:cNvSpPr>
-          <p:nvPr>
-            <p:ph type="body" idx="13"/>
-          </p:nvPr>
-        </p:nvSpPr>
-        <p:spPr/>
-        <p:txBody>
-          <a:bodyPr/>
-          <a:lstStyle/>
-          <a:p>
-            <a:r>
-              <a:rPr sz="900" b="1" i="0" spc="60">
-                <a:solidFill>
-                  <a:srgbClr val="0271CE"/>
-                </a:solidFill>
-                <a:latin typeface="Calibri"/>
-              </a:rPr>
-              <a:t>VERSION · DATE</a:t>
-            </a:r>
-            <a:endParaRPr sz="1400" b="0" i="0">
-              <a:solidFill>
-                <a:srgbClr val="1F2A37"/>
-              </a:solidFill>
-              <a:latin typeface="Calibri"/>
-            </a:endParaRPr>
-          </a:p>
-          <a:p>
-            <a:endParaRPr sz="1400" b="0" i="0">
-              <a:solidFill>
-                <a:srgbClr val="1F2A37"/>
-              </a:solidFill>
-              <a:latin typeface="Calibri"/>
-            </a:endParaRPr>
-          </a:p>
-        </p:txBody>
-      </p:sp>
-      <p:sp>
-        <p:nvSpPr>
-          <p:cNvPr id="7" name="cover.status"/>
-          <p:cNvSpPr>
-            <a:spLocks noGrp="1"/>
-          </p:cNvSpPr>
-          <p:nvPr>
-            <p:ph type="body" idx="14"/>
-          </p:nvPr>
-        </p:nvSpPr>
-        <p:spPr/>
-        <p:txBody>
-          <a:bodyPr/>
-          <a:lstStyle/>
-          <a:p>
-            <a:r>
-              <a:rPr sz="900" b="1" i="0" spc="60">
-                <a:solidFill>
-                  <a:srgbClr val="0271CE"/>
-                </a:solidFill>
-                <a:latin typeface="Calibri"/>
-              </a:rPr>
-              <a:t>STATUS</a:t>
-            </a:r>
-            <a:endParaRPr sz="1400" b="0" i="0">
-              <a:solidFill>
-                <a:srgbClr val="1F2A37"/>
-              </a:solidFill>
-              <a:latin typeface="Calibri"/>
-            </a:endParaRPr>
-          </a:p>
-          <a:p>
-            <a:endParaRPr sz="1400" b="0" i="0">
               <a:solidFill>
                 <a:srgbClr val="1F2A37"/>
               </a:solidFill>
@@ -9017,88 +7701,6 @@
           </a:p>
         </p:txBody>
       </p:sp>
-      <p:sp>
-        <p:nvSpPr>
-          <p:cNvPr id="5" name="close.authorities"/>
-          <p:cNvSpPr>
-            <a:spLocks noGrp="1"/>
-          </p:cNvSpPr>
-          <p:nvPr>
-            <p:ph type="body" idx="12"/>
-          </p:nvPr>
-        </p:nvSpPr>
-        <p:spPr/>
-        <p:txBody>
-          <a:bodyPr/>
-          <a:lstStyle/>
-          <a:p>
-            <a:r>
-              <a:rPr sz="900" b="1" i="0" spc="60">
-                <a:solidFill>
-                  <a:srgbClr val="0271CE"/>
-                </a:solidFill>
-                <a:latin typeface="Calibri"/>
-              </a:rPr>
-              <a:t>EXTERNAL AUTHORITIES</a:t>
-            </a:r>
-            <a:endParaRPr sz="1000" b="0" i="0">
-              <a:solidFill>
-                <a:srgbClr val="1F2A37"/>
-              </a:solidFill>
-              <a:latin typeface="Calibri"/>
-            </a:endParaRPr>
-          </a:p>
-          <a:p>
-            <a:endParaRPr sz="1000" b="0" i="0">
-              <a:solidFill>
-                <a:srgbClr val="1F2A37"/>
-              </a:solidFill>
-              <a:latin typeface="Calibri"/>
-            </a:endParaRPr>
-          </a:p>
-        </p:txBody>
-      </p:sp>
-      <p:sp>
-        <p:nvSpPr>
-          <p:cNvPr id="6" name="close.internal"/>
-          <p:cNvSpPr>
-            <a:spLocks noGrp="1"/>
-          </p:cNvSpPr>
-          <p:nvPr>
-            <p:ph type="body" idx="13"/>
-          </p:nvPr>
-        </p:nvSpPr>
-        <p:spPr/>
-        <p:txBody>
-          <a:bodyPr/>
-          <a:lstStyle/>
-          <a:p>
-            <a:r>
-              <a:rPr sz="900" b="1" i="0" spc="60">
-                <a:solidFill>
-                  <a:srgbClr val="0271CE"/>
-                </a:solidFill>
-                <a:latin typeface="Calibri"/>
-              </a:rPr>
-              <a:t>INTERNAL SOURCE SLIDES</a:t>
-            </a:r>
-            <a:endParaRPr sz="1000" b="0" i="0">
-              <a:solidFill>
-                <a:srgbClr val="1F2A37"/>
-              </a:solidFill>
-              <a:latin typeface="Calibri"/>
-            </a:endParaRPr>
-          </a:p>
-          <a:p>
-            <a:endParaRPr sz="1000" b="0" i="0">
-              <a:solidFill>
-                <a:srgbClr val="1F2A37"/>
-              </a:solidFill>
-              <a:latin typeface="Calibri"/>
-            </a:endParaRPr>
-          </a:p>
-        </p:txBody>
-      </p:sp>
     </p:spTree>
   </p:cSld>
   <p:clrMapOvr>
@@ -9312,88 +7914,6 @@
           </a:p>
         </p:txBody>
       </p:sp>
-      <p:sp>
-        <p:nvSpPr>
-          <p:cNvPr id="5" name="brief.steps"/>
-          <p:cNvSpPr>
-            <a:spLocks noGrp="1"/>
-          </p:cNvSpPr>
-          <p:nvPr>
-            <p:ph type="body" idx="12"/>
-          </p:nvPr>
-        </p:nvSpPr>
-        <p:spPr/>
-        <p:txBody>
-          <a:bodyPr/>
-          <a:lstStyle/>
-          <a:p>
-            <a:r>
-              <a:rPr sz="900" b="1" i="0" spc="60">
-                <a:solidFill>
-                  <a:srgbClr val="0271CE"/>
-                </a:solidFill>
-                <a:latin typeface="Calibri"/>
-              </a:rPr>
-              <a:t>STEPS, IN ORDER — ONE PER LINE, EACH STARTING WITH ITS MODE</a:t>
-            </a:r>
-            <a:endParaRPr sz="1200" b="0" i="0">
-              <a:solidFill>
-                <a:srgbClr val="1F2A37"/>
-              </a:solidFill>
-              <a:latin typeface="Calibri"/>
-            </a:endParaRPr>
-          </a:p>
-          <a:p>
-            <a:endParaRPr sz="1200" b="0" i="0">
-              <a:solidFill>
-                <a:srgbClr val="1F2A37"/>
-              </a:solidFill>
-              <a:latin typeface="Calibri"/>
-            </a:endParaRPr>
-          </a:p>
-        </p:txBody>
-      </p:sp>
-      <p:sp>
-        <p:nvSpPr>
-          <p:cNvPr id="6" name="brief.sources"/>
-          <p:cNvSpPr>
-            <a:spLocks noGrp="1"/>
-          </p:cNvSpPr>
-          <p:nvPr>
-            <p:ph type="body" idx="13"/>
-          </p:nvPr>
-        </p:nvSpPr>
-        <p:spPr/>
-        <p:txBody>
-          <a:bodyPr/>
-          <a:lstStyle/>
-          <a:p>
-            <a:r>
-              <a:rPr sz="900" b="1" i="0" spc="60">
-                <a:solidFill>
-                  <a:srgbClr val="0271CE"/>
-                </a:solidFill>
-                <a:latin typeface="Calibri"/>
-              </a:rPr>
-              <a:t>SOURCE SLIDES OR DOCUMENTS</a:t>
-            </a:r>
-            <a:endParaRPr sz="1200" b="0" i="0">
-              <a:solidFill>
-                <a:srgbClr val="1F2A37"/>
-              </a:solidFill>
-              <a:latin typeface="Calibri"/>
-            </a:endParaRPr>
-          </a:p>
-          <a:p>
-            <a:endParaRPr sz="1200" b="0" i="0">
-              <a:solidFill>
-                <a:srgbClr val="1F2A37"/>
-              </a:solidFill>
-              <a:latin typeface="Calibri"/>
-            </a:endParaRPr>
-          </a:p>
-        </p:txBody>
-      </p:sp>
     </p:spTree>
   </p:cSld>
   <p:clrMapOvr>
@@ -9602,7 +8122,7 @@
                 </a:solidFill>
                 <a:latin typeface="Calibri"/>
               </a:rPr>
-              <a:t>THE TEACHING</a:t>
+              <a:t>CORE TOPICS</a:t>
             </a:r>
           </a:p>
         </p:txBody>
@@ -9629,7 +8149,7 @@
                 </a:solidFill>
                 <a:latin typeface="Calibri"/>
               </a:rPr>
-              <a:t>MUST-KNOWS — 3 TO 6, ONE PER LINE</a:t>
+              <a:t>MUST-KNOWS — ONE PER LINE</a:t>
             </a:r>
             <a:endParaRPr sz="1200" b="0" i="0">
               <a:solidFill>
@@ -9811,7 +8331,7 @@
                 </a:solidFill>
                 <a:latin typeface="Calibri"/>
               </a:rPr>
-              <a:t>THE OPENING</a:t>
+              <a:t>INITIAL REFLECTION</a:t>
             </a:r>
           </a:p>
         </p:txBody>
@@ -9920,7 +8440,7 @@
                 </a:solidFill>
                 <a:latin typeface="Calibri"/>
               </a:rPr>
-              <a:t>LISTEN FOR — AND HOW TO ACKNOWLEDGE IT</a:t>
+              <a:t>LISTEN FOR</a:t>
             </a:r>
             <a:endParaRPr sz="1200" b="0" i="0">
               <a:solidFill>
@@ -10047,7 +8567,7 @@
                 </a:solidFill>
                 <a:latin typeface="Calibri"/>
               </a:rPr>
-              <a:t>RIGHT ANSWER?</a:t>
+              <a:t>IS THERE A RIGHT ANSWER?</a:t>
             </a:r>
             <a:endParaRPr sz="800" b="0" i="0">
               <a:solidFill>
@@ -10211,7 +8731,7 @@
                 </a:solidFill>
                 <a:latin typeface="Calibri"/>
               </a:rPr>
-              <a:t>UNTHOUGHTFUL</a:t>
+              <a:t>RESPONSE: UNTHOUGHTFUL</a:t>
             </a:r>
             <a:endParaRPr sz="950" b="0" i="0">
               <a:solidFill>
@@ -10334,7 +8854,7 @@
                 </a:solidFill>
                 <a:latin typeface="Calibri"/>
               </a:rPr>
-              <a:t>NEUTRAL</a:t>
+              <a:t>RESPONSE: NEUTRAL</a:t>
             </a:r>
             <a:endParaRPr sz="950" b="0" i="0">
               <a:solidFill>
@@ -10457,7 +8977,7 @@
                 </a:solidFill>
                 <a:latin typeface="Calibri"/>
               </a:rPr>
-              <a:t>STRONG</a:t>
+              <a:t>RESPONSE: STRONG</a:t>
             </a:r>
             <a:endParaRPr sz="950" b="0" i="0">
               <a:solidFill>
@@ -10580,7 +9100,7 @@
                 </a:solidFill>
                 <a:latin typeface="Calibri"/>
               </a:rPr>
-              <a:t>DEBRIEF LANDS — 2 TO 4 POINTS EVERY LEARNER HEARS, HOWEVER THE ATTEMPT WENT</a:t>
+              <a:t>DEBRIEF — 2 TO 4 POINTS EVERY LEARNER HEARS, HOWEVER THE ATTEMPT WENT</a:t>
             </a:r>
             <a:endParaRPr sz="950" b="0" i="0">
               <a:solidFill>
@@ -10666,7 +9186,7 @@
                 </a:solidFill>
                 <a:latin typeface="Calibri"/>
               </a:rPr>
-              <a:t>UNTHOUGHTFUL</a:t>
+              <a:t>EXAMPLE RESPONSE: UNTHOUGHTFUL</a:t>
             </a:r>
             <a:endParaRPr sz="1100" b="0" i="0">
               <a:solidFill>
@@ -10759,7 +9279,7 @@
                 </a:solidFill>
                 <a:latin typeface="Calibri"/>
               </a:rPr>
-              <a:t>NEUTRAL</a:t>
+              <a:t>EXAMPLE RESPONSE: NEUTRAL</a:t>
             </a:r>
             <a:endParaRPr sz="1100" b="0" i="0">
               <a:solidFill>
@@ -10852,7 +9372,7 @@
                 </a:solidFill>
                 <a:latin typeface="Calibri"/>
               </a:rPr>
-              <a:t>STRONG</a:t>
+              <a:t>EXAMPLE RESPONSE: STRONG</a:t>
             </a:r>
             <a:endParaRPr sz="1100" b="0" i="0">
               <a:solidFill>
@@ -11031,7 +9551,7 @@
                 </a:solidFill>
                 <a:latin typeface="Calibri"/>
               </a:rPr>
-              <a:t>RIGHT ANSWER?</a:t>
+              <a:t>IS THERE A RIGHT ANSWER?</a:t>
             </a:r>
             <a:endParaRPr sz="800" b="0" i="0">
               <a:solidFill>
@@ -11195,7 +9715,7 @@
                 </a:solidFill>
                 <a:latin typeface="Calibri"/>
               </a:rPr>
-              <a:t>UNTHOUGHTFUL</a:t>
+              <a:t>RESPONSE: UNTHOUGHTFUL</a:t>
             </a:r>
             <a:endParaRPr sz="950" b="0" i="0">
               <a:solidFill>
@@ -11318,7 +9838,7 @@
                 </a:solidFill>
                 <a:latin typeface="Calibri"/>
               </a:rPr>
-              <a:t>NEUTRAL</a:t>
+              <a:t>RESPONSE: NEUTRAL</a:t>
             </a:r>
             <a:endParaRPr sz="950" b="0" i="0">
               <a:solidFill>
@@ -11441,7 +9961,7 @@
                 </a:solidFill>
                 <a:latin typeface="Calibri"/>
               </a:rPr>
-              <a:t>STRONG</a:t>
+              <a:t>RESPONSE: STRONG</a:t>
             </a:r>
             <a:endParaRPr sz="950" b="0" i="0">
               <a:solidFill>
@@ -11564,7 +10084,7 @@
                 </a:solidFill>
                 <a:latin typeface="Calibri"/>
               </a:rPr>
-              <a:t>DEBRIEF LANDS — 2 TO 4 POINTS EVERY LEARNER HEARS, HOWEVER THE ATTEMPT WENT</a:t>
+              <a:t>DEBRIEF — 2 TO 4 POINTS EVERY LEARNER HEARS, HOWEVER THE ATTEMPT WENT</a:t>
             </a:r>
             <a:endParaRPr sz="950" b="0" i="0">
               <a:solidFill>
@@ -11691,7 +10211,7 @@
                 </a:solidFill>
                 <a:latin typeface="Calibri"/>
               </a:rPr>
-              <a:t>RIGHT ANSWER?</a:t>
+              <a:t>IS THERE A RIGHT ANSWER?</a:t>
             </a:r>
             <a:endParaRPr sz="800" b="0" i="0">
               <a:solidFill>
@@ -11855,7 +10375,7 @@
                 </a:solidFill>
                 <a:latin typeface="Calibri"/>
               </a:rPr>
-              <a:t>UNTHOUGHTFUL</a:t>
+              <a:t>RESPONSE: UNTHOUGHTFUL</a:t>
             </a:r>
             <a:endParaRPr sz="950" b="0" i="0">
               <a:solidFill>
@@ -11978,7 +10498,7 @@
                 </a:solidFill>
                 <a:latin typeface="Calibri"/>
               </a:rPr>
-              <a:t>NEUTRAL</a:t>
+              <a:t>RESPONSE: NEUTRAL</a:t>
             </a:r>
             <a:endParaRPr sz="950" b="0" i="0">
               <a:solidFill>
@@ -12101,7 +10621,7 @@
                 </a:solidFill>
                 <a:latin typeface="Calibri"/>
               </a:rPr>
-              <a:t>STRONG</a:t>
+              <a:t>RESPONSE: STRONG</a:t>
             </a:r>
             <a:endParaRPr sz="950" b="0" i="0">
               <a:solidFill>
@@ -12224,7 +10744,7 @@
                 </a:solidFill>
                 <a:latin typeface="Calibri"/>
               </a:rPr>
-              <a:t>DEBRIEF LANDS — 2 TO 4 POINTS EVERY LEARNER HEARS, HOWEVER THE ATTEMPT WENT</a:t>
+              <a:t>DEBRIEF — 2 TO 4 POINTS EVERY LEARNER HEARS, HOWEVER THE ATTEMPT WENT</a:t>
             </a:r>
             <a:endParaRPr sz="950" b="0" i="0">
               <a:solidFill>
